--- a/deep_learning/fine_tuning/2-FineTuning-Techniques.pptx
+++ b/deep_learning/fine_tuning/2-FineTuning-Techniques.pptx
@@ -5,10 +5,10 @@
     <p:sldMasterId id="2147483648" r:id="rId1"/>
   </p:sldMasterIdLst>
   <p:notesMasterIdLst>
-    <p:notesMasterId r:id="rId10"/>
+    <p:notesMasterId r:id="rId11"/>
   </p:notesMasterIdLst>
   <p:handoutMasterIdLst>
-    <p:handoutMasterId r:id="rId11"/>
+    <p:handoutMasterId r:id="rId12"/>
   </p:handoutMasterIdLst>
   <p:sldIdLst>
     <p:sldId id="276" r:id="rId2"/>
@@ -17,8 +17,9 @@
     <p:sldId id="277" r:id="rId5"/>
     <p:sldId id="278" r:id="rId6"/>
     <p:sldId id="279" r:id="rId7"/>
-    <p:sldId id="272" r:id="rId8"/>
-    <p:sldId id="275" r:id="rId9"/>
+    <p:sldId id="281" r:id="rId8"/>
+    <p:sldId id="272" r:id="rId9"/>
+    <p:sldId id="275" r:id="rId10"/>
   </p:sldIdLst>
   <p:sldSz cx="12192000" cy="6858000"/>
   <p:notesSz cx="6858000" cy="9144000"/>
@@ -222,7 +223,7 @@
           <a:p>
             <a:fld id="{7BAEECA8-D063-486F-AE31-5020270C1449}" type="datetimeFigureOut">
               <a:rPr lang="en-US" smtClean="0"/>
-              <a:t>3/26/2026</a:t>
+              <a:t>4/26/2026</a:t>
             </a:fld>
             <a:endParaRPr lang="en-US"/>
           </a:p>
@@ -399,7 +400,7 @@
           <a:p>
             <a:fld id="{CB233BD1-3BA8-448D-9D08-7846095EA517}" type="datetimeFigureOut">
               <a:rPr lang="en-US" smtClean="0"/>
-              <a:t>3/26/2026</a:t>
+              <a:t>4/26/2026</a:t>
             </a:fld>
             <a:endParaRPr lang="en-US"/>
           </a:p>
@@ -813,7 +814,7 @@
           <a:p>
             <a:fld id="{6383FAE1-13DE-4511-8C1B-C8AFB720664C}" type="datetimeFigureOut">
               <a:rPr lang="en-US" smtClean="0"/>
-              <a:t>3/26/2026</a:t>
+              <a:t>4/26/2026</a:t>
             </a:fld>
             <a:endParaRPr lang="en-US"/>
           </a:p>
@@ -1011,7 +1012,7 @@
           <a:p>
             <a:fld id="{6383FAE1-13DE-4511-8C1B-C8AFB720664C}" type="datetimeFigureOut">
               <a:rPr lang="en-US" smtClean="0"/>
-              <a:t>3/26/2026</a:t>
+              <a:t>4/26/2026</a:t>
             </a:fld>
             <a:endParaRPr lang="en-US"/>
           </a:p>
@@ -1219,7 +1220,7 @@
           <a:p>
             <a:fld id="{6383FAE1-13DE-4511-8C1B-C8AFB720664C}" type="datetimeFigureOut">
               <a:rPr lang="en-US" smtClean="0"/>
-              <a:t>3/26/2026</a:t>
+              <a:t>4/26/2026</a:t>
             </a:fld>
             <a:endParaRPr lang="en-US"/>
           </a:p>
@@ -1417,7 +1418,7 @@
           <a:p>
             <a:fld id="{6383FAE1-13DE-4511-8C1B-C8AFB720664C}" type="datetimeFigureOut">
               <a:rPr lang="en-US" smtClean="0"/>
-              <a:t>3/26/2026</a:t>
+              <a:t>4/26/2026</a:t>
             </a:fld>
             <a:endParaRPr lang="en-US"/>
           </a:p>
@@ -1692,7 +1693,7 @@
           <a:p>
             <a:fld id="{6383FAE1-13DE-4511-8C1B-C8AFB720664C}" type="datetimeFigureOut">
               <a:rPr lang="en-US" smtClean="0"/>
-              <a:t>3/26/2026</a:t>
+              <a:t>4/26/2026</a:t>
             </a:fld>
             <a:endParaRPr lang="en-US"/>
           </a:p>
@@ -1957,7 +1958,7 @@
           <a:p>
             <a:fld id="{6383FAE1-13DE-4511-8C1B-C8AFB720664C}" type="datetimeFigureOut">
               <a:rPr lang="en-US" smtClean="0"/>
-              <a:t>3/26/2026</a:t>
+              <a:t>4/26/2026</a:t>
             </a:fld>
             <a:endParaRPr lang="en-US"/>
           </a:p>
@@ -2369,7 +2370,7 @@
           <a:p>
             <a:fld id="{6383FAE1-13DE-4511-8C1B-C8AFB720664C}" type="datetimeFigureOut">
               <a:rPr lang="en-US" smtClean="0"/>
-              <a:t>3/26/2026</a:t>
+              <a:t>4/26/2026</a:t>
             </a:fld>
             <a:endParaRPr lang="en-US"/>
           </a:p>
@@ -2510,7 +2511,7 @@
           <a:p>
             <a:fld id="{6383FAE1-13DE-4511-8C1B-C8AFB720664C}" type="datetimeFigureOut">
               <a:rPr lang="en-US" smtClean="0"/>
-              <a:t>3/26/2026</a:t>
+              <a:t>4/26/2026</a:t>
             </a:fld>
             <a:endParaRPr lang="en-US"/>
           </a:p>
@@ -2623,7 +2624,7 @@
           <a:p>
             <a:fld id="{6383FAE1-13DE-4511-8C1B-C8AFB720664C}" type="datetimeFigureOut">
               <a:rPr lang="en-US" smtClean="0"/>
-              <a:t>3/26/2026</a:t>
+              <a:t>4/26/2026</a:t>
             </a:fld>
             <a:endParaRPr lang="en-US"/>
           </a:p>
@@ -2934,7 +2935,7 @@
           <a:p>
             <a:fld id="{6383FAE1-13DE-4511-8C1B-C8AFB720664C}" type="datetimeFigureOut">
               <a:rPr lang="en-US" smtClean="0"/>
-              <a:t>3/26/2026</a:t>
+              <a:t>4/26/2026</a:t>
             </a:fld>
             <a:endParaRPr lang="en-US"/>
           </a:p>
@@ -3225,7 +3226,7 @@
           <a:p>
             <a:fld id="{6383FAE1-13DE-4511-8C1B-C8AFB720664C}" type="datetimeFigureOut">
               <a:rPr lang="en-US" smtClean="0"/>
-              <a:t>3/26/2026</a:t>
+              <a:t>4/26/2026</a:t>
             </a:fld>
             <a:endParaRPr lang="en-US"/>
           </a:p>
@@ -3469,7 +3470,7 @@
           <a:p>
             <a:fld id="{6383FAE1-13DE-4511-8C1B-C8AFB720664C}" type="datetimeFigureOut">
               <a:rPr lang="en-US" smtClean="0"/>
-              <a:t>3/26/2026</a:t>
+              <a:t>4/26/2026</a:t>
             </a:fld>
             <a:endParaRPr lang="en-US"/>
           </a:p>
@@ -4043,7 +4044,7 @@
         <p:spPr>
           <a:xfrm>
             <a:off x="2118360" y="762293"/>
-            <a:ext cx="7178040" cy="954107"/>
+            <a:ext cx="7178040" cy="1446550"/>
           </a:xfrm>
           <a:prstGeom prst="rect">
             <a:avLst/>
@@ -4058,7 +4059,7 @@
           <a:p>
             <a:pPr algn="ctr"/>
             <a:r>
-              <a:rPr lang="en-US" sz="2800" b="1" dirty="0">
+              <a:rPr lang="en-US" sz="4400" b="1" dirty="0">
                 <a:solidFill>
                   <a:schemeClr val="accent6">
                     <a:lumMod val="60000"/>
@@ -4072,7 +4073,7 @@
           <a:p>
             <a:pPr algn="ctr"/>
             <a:r>
-              <a:rPr lang="en-US" sz="2800" b="1" dirty="0">
+              <a:rPr lang="en-US" sz="4400" b="1" dirty="0">
                 <a:solidFill>
                   <a:schemeClr val="accent6">
                     <a:lumMod val="60000"/>
@@ -4082,7 +4083,7 @@
               </a:rPr>
               <a:t>Techniques </a:t>
             </a:r>
-            <a:endParaRPr lang="en-US" sz="2800" dirty="0">
+            <a:endParaRPr lang="en-US" sz="4400" dirty="0">
               <a:solidFill>
                 <a:schemeClr val="accent6">
                   <a:lumMod val="60000"/>
@@ -4549,7 +4550,7 @@
         <p:spPr>
           <a:xfrm>
             <a:off x="326136" y="231940"/>
-            <a:ext cx="6038088" cy="4524315"/>
+            <a:ext cx="11222736" cy="4154984"/>
           </a:xfrm>
           <a:prstGeom prst="rect">
             <a:avLst/>
@@ -4797,7 +4798,7 @@
         <p:spPr>
           <a:xfrm>
             <a:off x="326136" y="433108"/>
-            <a:ext cx="7178040" cy="3416320"/>
+            <a:ext cx="7178040" cy="2308324"/>
           </a:xfrm>
           <a:prstGeom prst="rect">
             <a:avLst/>
@@ -4899,6 +4900,87 @@
             </a:r>
           </a:p>
           <a:p>
+            <a:pPr marL="342900" indent="-342900">
+              <a:buFont typeface="Arial" panose="020B0604020202020204" pitchFamily="34" charset="0"/>
+              <a:buChar char="•"/>
+            </a:pPr>
+            <a:r>
+              <a:rPr lang="en-US" sz="2400" dirty="0">
+                <a:solidFill>
+                  <a:schemeClr val="accent6">
+                    <a:lumMod val="60000"/>
+                    <a:lumOff val="40000"/>
+                  </a:schemeClr>
+                </a:solidFill>
+              </a:rPr>
+              <a:t>Widely used in industry</a:t>
+            </a:r>
+          </a:p>
+        </p:txBody>
+      </p:sp>
+      <p:sp>
+        <p:nvSpPr>
+          <p:cNvPr id="3" name="TextBox 2">
+            <a:extLst>
+              <a:ext uri="{FF2B5EF4-FFF2-40B4-BE49-F238E27FC236}">
+                <a16:creationId xmlns:a16="http://schemas.microsoft.com/office/drawing/2014/main" id="{33BB654B-26AD-729C-99F8-A4E4A3BB8EF4}"/>
+              </a:ext>
+            </a:extLst>
+          </p:cNvPr>
+          <p:cNvSpPr txBox="1"/>
+          <p:nvPr/>
+        </p:nvSpPr>
+        <p:spPr>
+          <a:xfrm>
+            <a:off x="6615684" y="663940"/>
+            <a:ext cx="6190488" cy="4524315"/>
+          </a:xfrm>
+          <a:prstGeom prst="rect">
+            <a:avLst/>
+          </a:prstGeom>
+          <a:noFill/>
+        </p:spPr>
+        <p:txBody>
+          <a:bodyPr wrap="square">
+            <a:spAutoFit/>
+          </a:bodyPr>
+          <a:lstStyle/>
+          <a:p>
+            <a:r>
+              <a:rPr lang="en-US" sz="2400" dirty="0">
+                <a:solidFill>
+                  <a:schemeClr val="accent6">
+                    <a:lumMod val="60000"/>
+                    <a:lumOff val="40000"/>
+                  </a:schemeClr>
+                </a:solidFill>
+              </a:rPr>
+              <a:t>Key benefit of </a:t>
+            </a:r>
+            <a:r>
+              <a:rPr lang="en-US" sz="2400" dirty="0" err="1">
+                <a:solidFill>
+                  <a:schemeClr val="accent6">
+                    <a:lumMod val="60000"/>
+                    <a:lumOff val="40000"/>
+                  </a:schemeClr>
+                </a:solidFill>
+              </a:rPr>
+              <a:t>LoRA</a:t>
+            </a:r>
+            <a:r>
+              <a:rPr lang="en-US" sz="2400" dirty="0">
+                <a:solidFill>
+                  <a:schemeClr val="accent6">
+                    <a:lumMod val="60000"/>
+                    <a:lumOff val="40000"/>
+                  </a:schemeClr>
+                </a:solidFill>
+              </a:rPr>
+              <a:t>:</a:t>
+            </a:r>
+          </a:p>
+          <a:p>
             <a:endParaRPr lang="en-US" sz="2400" dirty="0">
               <a:solidFill>
                 <a:schemeClr val="accent6">
@@ -4910,37 +4992,15 @@
           </a:p>
           <a:p>
             <a:r>
-              <a:rPr lang="en-US" sz="2400" dirty="0">
-                <a:solidFill>
-                  <a:schemeClr val="accent6">
-                    <a:lumMod val="60000"/>
-                    <a:lumOff val="40000"/>
-                  </a:schemeClr>
-                </a:solidFill>
-              </a:rPr>
-              <a:t>Key benefit of </a:t>
-            </a:r>
-            <a:r>
-              <a:rPr lang="en-US" sz="2400" dirty="0" err="1">
-                <a:solidFill>
-                  <a:schemeClr val="accent6">
-                    <a:lumMod val="60000"/>
-                    <a:lumOff val="40000"/>
-                  </a:schemeClr>
-                </a:solidFill>
-              </a:rPr>
-              <a:t>LoRA</a:t>
-            </a:r>
-            <a:r>
-              <a:rPr lang="en-US" sz="2400" dirty="0">
-                <a:solidFill>
-                  <a:schemeClr val="accent6">
-                    <a:lumMod val="60000"/>
-                    <a:lumOff val="40000"/>
-                  </a:schemeClr>
-                </a:solidFill>
-              </a:rPr>
-              <a:t>:</a:t>
+              <a:rPr lang="en-US" sz="2400" b="1" dirty="0">
+                <a:solidFill>
+                  <a:schemeClr val="accent6">
+                    <a:lumMod val="60000"/>
+                    <a:lumOff val="40000"/>
+                  </a:schemeClr>
+                </a:solidFill>
+              </a:rPr>
+              <a:t>1. 💰 Massive cost reduction</a:t>
             </a:r>
           </a:p>
           <a:p>
@@ -4957,7 +5017,29 @@
                   </a:schemeClr>
                 </a:solidFill>
               </a:rPr>
-              <a:t>Very low compute required</a:t>
+              <a:t>Train </a:t>
+            </a:r>
+            <a:r>
+              <a:rPr lang="en-US" sz="2400" b="1" dirty="0">
+                <a:solidFill>
+                  <a:schemeClr val="accent6">
+                    <a:lumMod val="60000"/>
+                    <a:lumOff val="40000"/>
+                  </a:schemeClr>
+                </a:solidFill>
+              </a:rPr>
+              <a:t>&lt;1% parameters</a:t>
+            </a:r>
+            <a:r>
+              <a:rPr lang="en-US" sz="2400" dirty="0">
+                <a:solidFill>
+                  <a:schemeClr val="accent6">
+                    <a:lumMod val="60000"/>
+                    <a:lumOff val="40000"/>
+                  </a:schemeClr>
+                </a:solidFill>
+              </a:rPr>
+              <a:t> </a:t>
             </a:r>
           </a:p>
           <a:p>
@@ -4974,8 +5056,179 @@
                   </a:schemeClr>
                 </a:solidFill>
               </a:rPr>
-              <a:t>Widely used in industry</a:t>
-            </a:r>
+              <a:t>Less GPU memory </a:t>
+            </a:r>
+          </a:p>
+          <a:p>
+            <a:pPr marL="342900" indent="-342900">
+              <a:buFont typeface="Arial" panose="020B0604020202020204" pitchFamily="34" charset="0"/>
+              <a:buChar char="•"/>
+            </a:pPr>
+            <a:r>
+              <a:rPr lang="en-US" sz="2400" dirty="0">
+                <a:solidFill>
+                  <a:schemeClr val="accent6">
+                    <a:lumMod val="60000"/>
+                    <a:lumOff val="40000"/>
+                  </a:schemeClr>
+                </a:solidFill>
+              </a:rPr>
+              <a:t>Faster training</a:t>
+            </a:r>
+          </a:p>
+          <a:p>
+            <a:pPr marL="342900" indent="-342900">
+              <a:buFont typeface="Arial" panose="020B0604020202020204" pitchFamily="34" charset="0"/>
+              <a:buChar char="•"/>
+            </a:pPr>
+            <a:endParaRPr lang="en-US" sz="2400" dirty="0">
+              <a:solidFill>
+                <a:schemeClr val="accent6">
+                  <a:lumMod val="60000"/>
+                  <a:lumOff val="40000"/>
+                </a:schemeClr>
+              </a:solidFill>
+            </a:endParaRPr>
+          </a:p>
+          <a:p>
+            <a:r>
+              <a:rPr lang="en-US" sz="2400" b="1" dirty="0">
+                <a:solidFill>
+                  <a:schemeClr val="accent6">
+                    <a:lumMod val="60000"/>
+                    <a:lumOff val="40000"/>
+                  </a:schemeClr>
+                </a:solidFill>
+              </a:rPr>
+              <a:t>2. ⚡ Fast experimentation</a:t>
+            </a:r>
+          </a:p>
+          <a:p>
+            <a:r>
+              <a:rPr lang="en-US" sz="2400" dirty="0">
+                <a:solidFill>
+                  <a:schemeClr val="accent6">
+                    <a:lumMod val="60000"/>
+                    <a:lumOff val="40000"/>
+                  </a:schemeClr>
+                </a:solidFill>
+              </a:rPr>
+              <a:t>Train multiple task-specific adapters: </a:t>
+            </a:r>
+          </a:p>
+          <a:p>
+            <a:pPr marL="342900" indent="-342900">
+              <a:buFont typeface="Arial" panose="020B0604020202020204" pitchFamily="34" charset="0"/>
+              <a:buChar char="•"/>
+            </a:pPr>
+            <a:r>
+              <a:rPr lang="en-US" sz="2400" dirty="0">
+                <a:solidFill>
+                  <a:schemeClr val="accent6">
+                    <a:lumMod val="60000"/>
+                    <a:lumOff val="40000"/>
+                  </a:schemeClr>
+                </a:solidFill>
+              </a:rPr>
+              <a:t>customer support </a:t>
+            </a:r>
+            <a:r>
+              <a:rPr lang="en-US" sz="2400" dirty="0" err="1">
+                <a:solidFill>
+                  <a:schemeClr val="accent6">
+                    <a:lumMod val="60000"/>
+                    <a:lumOff val="40000"/>
+                  </a:schemeClr>
+                </a:solidFill>
+              </a:rPr>
+              <a:t>LoRA</a:t>
+            </a:r>
+            <a:r>
+              <a:rPr lang="en-US" sz="2400" dirty="0">
+                <a:solidFill>
+                  <a:schemeClr val="accent6">
+                    <a:lumMod val="60000"/>
+                    <a:lumOff val="40000"/>
+                  </a:schemeClr>
+                </a:solidFill>
+              </a:rPr>
+              <a:t> </a:t>
+            </a:r>
+          </a:p>
+          <a:p>
+            <a:pPr marL="342900" indent="-342900">
+              <a:buFont typeface="Arial" panose="020B0604020202020204" pitchFamily="34" charset="0"/>
+              <a:buChar char="•"/>
+            </a:pPr>
+            <a:r>
+              <a:rPr lang="en-US" sz="2400" dirty="0">
+                <a:solidFill>
+                  <a:schemeClr val="accent6">
+                    <a:lumMod val="60000"/>
+                    <a:lumOff val="40000"/>
+                  </a:schemeClr>
+                </a:solidFill>
+              </a:rPr>
+              <a:t>legal </a:t>
+            </a:r>
+            <a:r>
+              <a:rPr lang="en-US" sz="2400" dirty="0" err="1">
+                <a:solidFill>
+                  <a:schemeClr val="accent6">
+                    <a:lumMod val="60000"/>
+                    <a:lumOff val="40000"/>
+                  </a:schemeClr>
+                </a:solidFill>
+              </a:rPr>
+              <a:t>LoRA</a:t>
+            </a:r>
+            <a:r>
+              <a:rPr lang="en-US" sz="2400" dirty="0">
+                <a:solidFill>
+                  <a:schemeClr val="accent6">
+                    <a:lumMod val="60000"/>
+                    <a:lumOff val="40000"/>
+                  </a:schemeClr>
+                </a:solidFill>
+              </a:rPr>
+              <a:t> </a:t>
+            </a:r>
+          </a:p>
+          <a:p>
+            <a:pPr marL="342900" indent="-342900">
+              <a:buFont typeface="Arial" panose="020B0604020202020204" pitchFamily="34" charset="0"/>
+              <a:buChar char="•"/>
+            </a:pPr>
+            <a:r>
+              <a:rPr lang="en-US" sz="2400" dirty="0">
+                <a:solidFill>
+                  <a:schemeClr val="accent6">
+                    <a:lumMod val="60000"/>
+                    <a:lumOff val="40000"/>
+                  </a:schemeClr>
+                </a:solidFill>
+              </a:rPr>
+              <a:t>medical </a:t>
+            </a:r>
+            <a:r>
+              <a:rPr lang="en-US" sz="2400" dirty="0" err="1">
+                <a:solidFill>
+                  <a:schemeClr val="accent6">
+                    <a:lumMod val="60000"/>
+                    <a:lumOff val="40000"/>
+                  </a:schemeClr>
+                </a:solidFill>
+              </a:rPr>
+              <a:t>LoRA</a:t>
+            </a:r>
+            <a:endParaRPr lang="en-US" sz="2400" dirty="0">
+              <a:solidFill>
+                <a:schemeClr val="accent6">
+                  <a:lumMod val="60000"/>
+                  <a:lumOff val="40000"/>
+                </a:schemeClr>
+              </a:solidFill>
+            </a:endParaRPr>
           </a:p>
         </p:txBody>
       </p:sp>
@@ -4997,6 +5250,279 @@
   <p:cSld>
     <p:spTree>
       <p:nvGrpSpPr>
+        <p:cNvPr id="1" name="">
+          <a:extLst>
+            <a:ext uri="{FF2B5EF4-FFF2-40B4-BE49-F238E27FC236}">
+              <a16:creationId xmlns:a16="http://schemas.microsoft.com/office/drawing/2014/main" id="{E4D63F54-41C5-DEDC-E1D5-39552FD64E26}"/>
+            </a:ext>
+          </a:extLst>
+        </p:cNvPr>
+        <p:cNvGrpSpPr/>
+        <p:nvPr/>
+      </p:nvGrpSpPr>
+      <p:grpSpPr>
+        <a:xfrm>
+          <a:off x="0" y="0"/>
+          <a:ext cx="0" cy="0"/>
+          <a:chOff x="0" y="0"/>
+          <a:chExt cx="0" cy="0"/>
+        </a:xfrm>
+      </p:grpSpPr>
+      <p:sp>
+        <p:nvSpPr>
+          <p:cNvPr id="9" name="TextBox 8">
+            <a:extLst>
+              <a:ext uri="{FF2B5EF4-FFF2-40B4-BE49-F238E27FC236}">
+                <a16:creationId xmlns:a16="http://schemas.microsoft.com/office/drawing/2014/main" id="{A721AFAB-20CC-2732-B57D-E37D89F7D0E8}"/>
+              </a:ext>
+            </a:extLst>
+          </p:cNvPr>
+          <p:cNvSpPr txBox="1"/>
+          <p:nvPr/>
+        </p:nvSpPr>
+        <p:spPr>
+          <a:xfrm>
+            <a:off x="326136" y="433108"/>
+            <a:ext cx="9211056" cy="4154984"/>
+          </a:xfrm>
+          <a:prstGeom prst="rect">
+            <a:avLst/>
+          </a:prstGeom>
+          <a:noFill/>
+        </p:spPr>
+        <p:txBody>
+          <a:bodyPr wrap="square">
+            <a:spAutoFit/>
+          </a:bodyPr>
+          <a:lstStyle/>
+          <a:p>
+            <a:r>
+              <a:rPr lang="en-US" sz="2400" b="1" dirty="0">
+                <a:solidFill>
+                  <a:schemeClr val="accent6">
+                    <a:lumMod val="60000"/>
+                    <a:lumOff val="40000"/>
+                  </a:schemeClr>
+                </a:solidFill>
+              </a:rPr>
+              <a:t>Popular PEFT Method: </a:t>
+            </a:r>
+            <a:r>
+              <a:rPr lang="en-US" sz="2400" b="1" dirty="0" err="1">
+                <a:solidFill>
+                  <a:schemeClr val="accent6">
+                    <a:lumMod val="60000"/>
+                    <a:lumOff val="40000"/>
+                  </a:schemeClr>
+                </a:solidFill>
+              </a:rPr>
+              <a:t>QLoRA</a:t>
+            </a:r>
+            <a:r>
+              <a:rPr lang="en-US" sz="2400" b="1" dirty="0">
+                <a:solidFill>
+                  <a:schemeClr val="accent6">
+                    <a:lumMod val="60000"/>
+                    <a:lumOff val="40000"/>
+                  </a:schemeClr>
+                </a:solidFill>
+              </a:rPr>
+              <a:t> (Advanced but very practical)</a:t>
+            </a:r>
+          </a:p>
+          <a:p>
+            <a:endParaRPr lang="en-US" sz="2400" b="1" dirty="0">
+              <a:solidFill>
+                <a:schemeClr val="accent6">
+                  <a:lumMod val="60000"/>
+                  <a:lumOff val="40000"/>
+                </a:schemeClr>
+              </a:solidFill>
+            </a:endParaRPr>
+          </a:p>
+          <a:p>
+            <a:pPr marL="342900" indent="-342900">
+              <a:buFont typeface="Arial" panose="020B0604020202020204" pitchFamily="34" charset="0"/>
+              <a:buChar char="•"/>
+            </a:pPr>
+            <a:r>
+              <a:rPr lang="en-US" sz="2400" dirty="0">
+                <a:solidFill>
+                  <a:schemeClr val="accent6">
+                    <a:lumMod val="60000"/>
+                    <a:lumOff val="40000"/>
+                  </a:schemeClr>
+                </a:solidFill>
+              </a:rPr>
+              <a:t>“Quantized </a:t>
+            </a:r>
+            <a:r>
+              <a:rPr lang="en-US" sz="2400" dirty="0" err="1">
+                <a:solidFill>
+                  <a:schemeClr val="accent6">
+                    <a:lumMod val="60000"/>
+                    <a:lumOff val="40000"/>
+                  </a:schemeClr>
+                </a:solidFill>
+              </a:rPr>
+              <a:t>LoRA</a:t>
+            </a:r>
+            <a:r>
+              <a:rPr lang="en-US" sz="2400" dirty="0">
+                <a:solidFill>
+                  <a:schemeClr val="accent6">
+                    <a:lumMod val="60000"/>
+                    <a:lumOff val="40000"/>
+                  </a:schemeClr>
+                </a:solidFill>
+              </a:rPr>
+              <a:t>” </a:t>
+            </a:r>
+          </a:p>
+          <a:p>
+            <a:pPr marL="342900" indent="-342900">
+              <a:buFont typeface="Arial" panose="020B0604020202020204" pitchFamily="34" charset="0"/>
+              <a:buChar char="•"/>
+            </a:pPr>
+            <a:r>
+              <a:rPr lang="en-US" sz="2400" dirty="0">
+                <a:solidFill>
+                  <a:schemeClr val="accent6">
+                    <a:lumMod val="60000"/>
+                    <a:lumOff val="40000"/>
+                  </a:schemeClr>
+                </a:solidFill>
+              </a:rPr>
+              <a:t>Base model stored in 4-bit or 8-bit precision </a:t>
+            </a:r>
+          </a:p>
+          <a:p>
+            <a:pPr marL="342900" indent="-342900">
+              <a:buFont typeface="Arial" panose="020B0604020202020204" pitchFamily="34" charset="0"/>
+              <a:buChar char="•"/>
+            </a:pPr>
+            <a:r>
+              <a:rPr lang="en-US" sz="2400" dirty="0" err="1">
+                <a:solidFill>
+                  <a:schemeClr val="accent6">
+                    <a:lumMod val="60000"/>
+                    <a:lumOff val="40000"/>
+                  </a:schemeClr>
+                </a:solidFill>
+              </a:rPr>
+              <a:t>LoRA</a:t>
+            </a:r>
+            <a:r>
+              <a:rPr lang="en-US" sz="2400" dirty="0">
+                <a:solidFill>
+                  <a:schemeClr val="accent6">
+                    <a:lumMod val="60000"/>
+                    <a:lumOff val="40000"/>
+                  </a:schemeClr>
+                </a:solidFill>
+              </a:rPr>
+              <a:t> applied on top </a:t>
+            </a:r>
+          </a:p>
+          <a:p>
+            <a:pPr marL="342900" indent="-342900">
+              <a:buFont typeface="Arial" panose="020B0604020202020204" pitchFamily="34" charset="0"/>
+              <a:buChar char="•"/>
+            </a:pPr>
+            <a:endParaRPr lang="en-US" sz="2400" dirty="0">
+              <a:solidFill>
+                <a:schemeClr val="accent6">
+                  <a:lumMod val="60000"/>
+                  <a:lumOff val="40000"/>
+                </a:schemeClr>
+              </a:solidFill>
+            </a:endParaRPr>
+          </a:p>
+          <a:p>
+            <a:r>
+              <a:rPr lang="en-US" sz="2400" b="1" dirty="0">
+                <a:solidFill>
+                  <a:schemeClr val="accent6">
+                    <a:lumMod val="60000"/>
+                    <a:lumOff val="40000"/>
+                  </a:schemeClr>
+                </a:solidFill>
+              </a:rPr>
+              <a:t>Why it matters:</a:t>
+            </a:r>
+          </a:p>
+          <a:p>
+            <a:r>
+              <a:rPr lang="en-US" sz="2400" dirty="0">
+                <a:solidFill>
+                  <a:schemeClr val="accent6">
+                    <a:lumMod val="60000"/>
+                    <a:lumOff val="40000"/>
+                  </a:schemeClr>
+                </a:solidFill>
+              </a:rPr>
+              <a:t>Fine-tuning large models on a single GPU (even 16GB VRAM possible)</a:t>
+            </a:r>
+          </a:p>
+          <a:p>
+            <a:r>
+              <a:rPr lang="en-US" sz="2400" dirty="0">
+                <a:solidFill>
+                  <a:schemeClr val="accent6">
+                    <a:lumMod val="60000"/>
+                    <a:lumOff val="40000"/>
+                  </a:schemeClr>
+                </a:solidFill>
+              </a:rPr>
+              <a:t> </a:t>
+            </a:r>
+          </a:p>
+          <a:p>
+            <a:r>
+              <a:rPr lang="en-US" sz="2400" b="1" dirty="0">
+                <a:solidFill>
+                  <a:schemeClr val="accent6">
+                    <a:lumMod val="60000"/>
+                    <a:lumOff val="40000"/>
+                  </a:schemeClr>
+                </a:solidFill>
+              </a:rPr>
+              <a:t>Industry relevance:</a:t>
+            </a:r>
+          </a:p>
+          <a:p>
+            <a:r>
+              <a:rPr lang="en-US" sz="2400" dirty="0">
+                <a:solidFill>
+                  <a:schemeClr val="accent6">
+                    <a:lumMod val="60000"/>
+                    <a:lumOff val="40000"/>
+                  </a:schemeClr>
+                </a:solidFill>
+              </a:rPr>
+              <a:t>EXTREMELY HIGH for startups and research labs</a:t>
+            </a:r>
+          </a:p>
+        </p:txBody>
+      </p:sp>
+    </p:spTree>
+    <p:extLst>
+      <p:ext uri="{BB962C8B-B14F-4D97-AF65-F5344CB8AC3E}">
+        <p14:creationId xmlns:p14="http://schemas.microsoft.com/office/powerpoint/2010/main" val="3716582314"/>
+      </p:ext>
+    </p:extLst>
+  </p:cSld>
+  <p:clrMapOvr>
+    <a:masterClrMapping/>
+  </p:clrMapOvr>
+</p:sld>
+</file>
+
+<file path=ppt/slides/slide8.xml><?xml version="1.0" encoding="utf-8"?>
+<p:sld xmlns:a="http://schemas.openxmlformats.org/drawingml/2006/main" xmlns:r="http://schemas.openxmlformats.org/officeDocument/2006/relationships" xmlns:p="http://schemas.openxmlformats.org/presentationml/2006/main">
+  <p:cSld>
+    <p:spTree>
+      <p:nvGrpSpPr>
         <p:cNvPr id="1" name=""/>
         <p:cNvGrpSpPr/>
         <p:nvPr/>
@@ -5278,7 +5804,7 @@
 </p:sld>
 </file>
 
-<file path=ppt/slides/slide8.xml><?xml version="1.0" encoding="utf-8"?>
+<file path=ppt/slides/slide9.xml><?xml version="1.0" encoding="utf-8"?>
 <p:sld xmlns:a="http://schemas.openxmlformats.org/drawingml/2006/main" xmlns:r="http://schemas.openxmlformats.org/officeDocument/2006/relationships" xmlns:p="http://schemas.openxmlformats.org/presentationml/2006/main">
   <p:cSld>
     <p:spTree>
